--- a/slide.pptx
+++ b/slide.pptx
@@ -4336,7 +4336,7 @@
                 <a:effectLst/>
                 <a:latin typeface="+mn-lt"/>
               </a:rPr>
-              <a:t>Critical: Checks for NULL primary keys or duplicates. Action: Block promotion.</a:t>
+              <a:t>Critical: Checks for NULL primary keys or duplicates.</a:t>
             </a:r>
           </a:p>
           <a:p>
@@ -4349,7 +4349,7 @@
                 <a:effectLst/>
                 <a:latin typeface="+mn-lt"/>
               </a:rPr>
-              <a:t>Warning: Checks for business logic anomalies (e.g., negative prices). Action: Alert but proceed.</a:t>
+              <a:t>Warning: Checks for business logic anomalies (e.g., negative prices).</a:t>
             </a:r>
           </a:p>
           <a:p>
@@ -7072,7 +7072,7 @@
         </p:nvSpPr>
         <p:spPr>
           <a:xfrm>
-            <a:off x="3171039" y="1566080"/>
+            <a:off x="3171039" y="1574469"/>
             <a:ext cx="5913292" cy="5078313"/>
           </a:xfrm>
           <a:prstGeom prst="rect">
@@ -8539,15 +8539,6 @@
 </file>
 
 <file path=customXml/item2.xml><?xml version="1.0" encoding="utf-8"?>
-<?mso-contentType ?>
-<FormTemplates xmlns="http://schemas.microsoft.com/sharepoint/v3/contenttype/forms">
-  <Display>DocumentLibraryForm</Display>
-  <Edit>DocumentLibraryForm</Edit>
-  <New>DocumentLibraryForm</New>
-</FormTemplates>
-</file>
-
-<file path=customXml/item3.xml><?xml version="1.0" encoding="utf-8"?>
 <ct:contentTypeSchema xmlns:ct="http://schemas.microsoft.com/office/2006/metadata/contentType" xmlns:ma="http://schemas.microsoft.com/office/2006/metadata/properties/metaAttributes" ct:_="" ma:_="" ma:contentTypeName="Document" ma:contentTypeID="0x0101002D4B0F567DB6A048A3BD294556057AFF" ma:contentTypeVersion="10" ma:contentTypeDescription="Create a new document." ma:contentTypeScope="" ma:versionID="31c0f740d92a5fb9e81516f754310f2c">
   <xsd:schema xmlns:xsd="http://www.w3.org/2001/XMLSchema" xmlns:xs="http://www.w3.org/2001/XMLSchema" xmlns:p="http://schemas.microsoft.com/office/2006/metadata/properties" xmlns:ns3="2a578b54-47b9-4ee9-8bf0-b042a4683d6c" targetNamespace="http://schemas.microsoft.com/office/2006/metadata/properties" ma:root="true" ma:fieldsID="e063773740d8993c43ca851e59441d5c" ns3:_="">
     <xsd:import namespace="2a578b54-47b9-4ee9-8bf0-b042a4683d6c"/>
@@ -8729,6 +8720,15 @@
 </ct:contentTypeSchema>
 </file>
 
+<file path=customXml/item3.xml><?xml version="1.0" encoding="utf-8"?>
+<?mso-contentType ?>
+<FormTemplates xmlns="http://schemas.microsoft.com/sharepoint/v3/contenttype/forms">
+  <Display>DocumentLibraryForm</Display>
+  <Edit>DocumentLibraryForm</Edit>
+  <New>DocumentLibraryForm</New>
+</FormTemplates>
+</file>
+
 <file path=customXml/itemProps1.xml><?xml version="1.0" encoding="utf-8"?>
 <ds:datastoreItem xmlns:ds="http://schemas.openxmlformats.org/officeDocument/2006/customXml" ds:itemID="{6ACB3463-96C8-488B-B922-45134A704552}">
   <ds:schemaRefs>
@@ -8746,14 +8746,6 @@
 </file>
 
 <file path=customXml/itemProps2.xml><?xml version="1.0" encoding="utf-8"?>
-<ds:datastoreItem xmlns:ds="http://schemas.openxmlformats.org/officeDocument/2006/customXml" ds:itemID="{BC15E98E-1142-43DA-ABA7-DE52E5B52EB8}">
-  <ds:schemaRefs>
-    <ds:schemaRef ds:uri="http://schemas.microsoft.com/sharepoint/v3/contenttype/forms"/>
-  </ds:schemaRefs>
-</ds:datastoreItem>
-</file>
-
-<file path=customXml/itemProps3.xml><?xml version="1.0" encoding="utf-8"?>
 <ds:datastoreItem xmlns:ds="http://schemas.openxmlformats.org/officeDocument/2006/customXml" ds:itemID="{0327E607-237F-4AF9-B8C0-BBD832EEBA3E}">
   <ds:schemaRefs>
     <ds:schemaRef ds:uri="http://schemas.microsoft.com/office/2006/metadata/contentType"/>
@@ -8769,4 +8761,12 @@
     <ds:schemaRef ds:uri="http://schemas.microsoft.com/internal/obd"/>
   </ds:schemaRefs>
 </ds:datastoreItem>
+</file>
+
+<file path=customXml/itemProps3.xml><?xml version="1.0" encoding="utf-8"?>
+<ds:datastoreItem xmlns:ds="http://schemas.openxmlformats.org/officeDocument/2006/customXml" ds:itemID="{BC15E98E-1142-43DA-ABA7-DE52E5B52EB8}">
+  <ds:schemaRefs>
+    <ds:schemaRef ds:uri="http://schemas.microsoft.com/sharepoint/v3/contenttype/forms"/>
+  </ds:schemaRefs>
+</ds:datastoreItem>
 </file>